--- a/Beispiele/sebastian/final_xml-vorteile.pptx
+++ b/Beispiele/sebastian/final_xml-vorteile.pptx
@@ -124,6 +124,35 @@
     </p:ext>
   </p:extLst>
 </p:presentation>
+</file>
+
+<file path=ppt/changesInfos/changesInfo1.xml><?xml version="1.0" encoding="utf-8"?>
+<pc:chgInfo xmlns:a="http://schemas.openxmlformats.org/drawingml/2006/main" xmlns:r="http://schemas.openxmlformats.org/officeDocument/2006/relationships" xmlns:ac="http://schemas.microsoft.com/office/drawing/2013/main/command" xmlns:pc="http://schemas.microsoft.com/office/powerpoint/2013/main/command">
+  <pc:docChgLst>
+    <pc:chgData name="Koray Soguksu" userId="3e220d5204457e8d" providerId="LiveId" clId="{AE6BC8F6-E0CC-4B92-83ED-344A53F02923}"/>
+    <pc:docChg chg="modSld">
+      <pc:chgData name="Koray Soguksu" userId="3e220d5204457e8d" providerId="LiveId" clId="{AE6BC8F6-E0CC-4B92-83ED-344A53F02923}" dt="2026-04-27T08:34:16.663" v="14" actId="20577"/>
+      <pc:docMkLst>
+        <pc:docMk/>
+      </pc:docMkLst>
+      <pc:sldChg chg="modSp mod">
+        <pc:chgData name="Koray Soguksu" userId="3e220d5204457e8d" providerId="LiveId" clId="{AE6BC8F6-E0CC-4B92-83ED-344A53F02923}" dt="2026-04-27T08:34:16.663" v="14" actId="20577"/>
+        <pc:sldMkLst>
+          <pc:docMk/>
+          <pc:sldMk cId="0" sldId="256"/>
+        </pc:sldMkLst>
+        <pc:spChg chg="mod">
+          <ac:chgData name="Koray Soguksu" userId="3e220d5204457e8d" providerId="LiveId" clId="{AE6BC8F6-E0CC-4B92-83ED-344A53F02923}" dt="2026-04-27T08:34:16.663" v="14" actId="20577"/>
+          <ac:spMkLst>
+            <pc:docMk/>
+            <pc:sldMk cId="0" sldId="256"/>
+            <ac:spMk id="3" creationId="{00000000-0000-0000-0000-000000000000}"/>
+          </ac:spMkLst>
+        </pc:spChg>
+      </pc:sldChg>
+    </pc:docChg>
+  </pc:docChgLst>
+</pc:chgInfo>
 </file>
 
 <file path=ppt/handoutMasters/handoutMaster1.xml><?xml version="1.0" encoding="utf-8"?>
@@ -4244,7 +4273,15 @@
             </a:r>
             <a:r>
               <a:rPr lang="de-CH" sz="1600" b="0" dirty="0"/>
-              <a:t>, Claudia Schreiber, Sebastian Lorentz, Koray Soguksu</a:t>
+              <a:t>, Claudia Schreiber, Sebastian </a:t>
+            </a:r>
+            <a:r>
+              <a:rPr lang="de-CH" sz="1600" b="0"/>
+              <a:t>Lorentz, Martin Gajdos, </a:t>
+            </a:r>
+            <a:r>
+              <a:rPr lang="de-CH" sz="1600" b="0" dirty="0"/>
+              <a:t>Koray Soguksu</a:t>
             </a:r>
             <a:endParaRPr sz="1600" b="0" dirty="0"/>
           </a:p>

--- a/Beispiele/sebastian/final_xml-vorteile.pptx
+++ b/Beispiele/sebastian/final_xml-vorteile.pptx
@@ -126,12 +126,20 @@
 </p:presentation>
 </file>
 
+<file path=ppt/revisionInfo.xml><?xml version="1.0" encoding="utf-8"?>
+<p1510:revInfo xmlns:a="http://schemas.openxmlformats.org/drawingml/2006/main" xmlns:r="http://schemas.openxmlformats.org/officeDocument/2006/relationships" xmlns:p1510="http://schemas.microsoft.com/office/powerpoint/2015/10/main">
+  <p1510:revLst>
+    <p1510:client id="{ED2376E7-E834-4C8C-8B9A-7E0EFB3EB9FF}" v="2" dt="2026-04-27T08:44:30.462"/>
+  </p1510:revLst>
+</p1510:revInfo>
+</file>
+
 <file path=ppt/changesInfos/changesInfo1.xml><?xml version="1.0" encoding="utf-8"?>
 <pc:chgInfo xmlns:a="http://schemas.openxmlformats.org/drawingml/2006/main" xmlns:r="http://schemas.openxmlformats.org/officeDocument/2006/relationships" xmlns:ac="http://schemas.microsoft.com/office/drawing/2013/main/command" xmlns:pc="http://schemas.microsoft.com/office/powerpoint/2013/main/command">
   <pc:docChgLst>
     <pc:chgData name="Koray Soguksu" userId="3e220d5204457e8d" providerId="LiveId" clId="{AE6BC8F6-E0CC-4B92-83ED-344A53F02923}"/>
-    <pc:docChg chg="modSld">
-      <pc:chgData name="Koray Soguksu" userId="3e220d5204457e8d" providerId="LiveId" clId="{AE6BC8F6-E0CC-4B92-83ED-344A53F02923}" dt="2026-04-27T08:34:16.663" v="14" actId="20577"/>
+    <pc:docChg chg="custSel modSld">
+      <pc:chgData name="Koray Soguksu" userId="3e220d5204457e8d" providerId="LiveId" clId="{AE6BC8F6-E0CC-4B92-83ED-344A53F02923}" dt="2026-04-27T08:45:13.955" v="44" actId="1076"/>
       <pc:docMkLst>
         <pc:docMk/>
       </pc:docMkLst>
@@ -149,6 +157,67 @@
             <ac:spMk id="3" creationId="{00000000-0000-0000-0000-000000000000}"/>
           </ac:spMkLst>
         </pc:spChg>
+      </pc:sldChg>
+      <pc:sldChg chg="addSp modSp mod">
+        <pc:chgData name="Koray Soguksu" userId="3e220d5204457e8d" providerId="LiveId" clId="{AE6BC8F6-E0CC-4B92-83ED-344A53F02923}" dt="2026-04-27T08:45:13.955" v="44" actId="1076"/>
+        <pc:sldMkLst>
+          <pc:docMk/>
+          <pc:sldMk cId="0" sldId="258"/>
+        </pc:sldMkLst>
+        <pc:spChg chg="mod">
+          <ac:chgData name="Koray Soguksu" userId="3e220d5204457e8d" providerId="LiveId" clId="{AE6BC8F6-E0CC-4B92-83ED-344A53F02923}" dt="2026-04-27T08:44:59.757" v="39" actId="14100"/>
+          <ac:spMkLst>
+            <pc:docMk/>
+            <pc:sldMk cId="0" sldId="258"/>
+            <ac:spMk id="4" creationId="{00000000-0000-0000-0000-000000000000}"/>
+          </ac:spMkLst>
+        </pc:spChg>
+        <pc:picChg chg="add mod">
+          <ac:chgData name="Koray Soguksu" userId="3e220d5204457e8d" providerId="LiveId" clId="{AE6BC8F6-E0CC-4B92-83ED-344A53F02923}" dt="2026-04-27T08:45:13.955" v="44" actId="1076"/>
+          <ac:picMkLst>
+            <pc:docMk/>
+            <pc:sldMk cId="0" sldId="258"/>
+            <ac:picMk id="5" creationId="{00CE402C-9EE6-5227-F892-74B1618F9A55}"/>
+          </ac:picMkLst>
+        </pc:picChg>
+      </pc:sldChg>
+      <pc:sldChg chg="addSp delSp modSp mod">
+        <pc:chgData name="Koray Soguksu" userId="3e220d5204457e8d" providerId="LiveId" clId="{AE6BC8F6-E0CC-4B92-83ED-344A53F02923}" dt="2026-04-27T08:44:03.272" v="26" actId="21"/>
+        <pc:sldMkLst>
+          <pc:docMk/>
+          <pc:sldMk cId="0" sldId="259"/>
+        </pc:sldMkLst>
+        <pc:spChg chg="mod">
+          <ac:chgData name="Koray Soguksu" userId="3e220d5204457e8d" providerId="LiveId" clId="{AE6BC8F6-E0CC-4B92-83ED-344A53F02923}" dt="2026-04-27T08:43:20.649" v="20" actId="14100"/>
+          <ac:spMkLst>
+            <pc:docMk/>
+            <pc:sldMk cId="0" sldId="259"/>
+            <ac:spMk id="4" creationId="{00000000-0000-0000-0000-000000000000}"/>
+          </ac:spMkLst>
+        </pc:spChg>
+        <pc:picChg chg="add del mod">
+          <ac:chgData name="Koray Soguksu" userId="3e220d5204457e8d" providerId="LiveId" clId="{AE6BC8F6-E0CC-4B92-83ED-344A53F02923}" dt="2026-04-27T08:44:03.272" v="26" actId="21"/>
+          <ac:picMkLst>
+            <pc:docMk/>
+            <pc:sldMk cId="0" sldId="259"/>
+            <ac:picMk id="5" creationId="{00CE402C-9EE6-5227-F892-74B1618F9A55}"/>
+          </ac:picMkLst>
+        </pc:picChg>
+      </pc:sldChg>
+      <pc:sldChg chg="addSp delSp modSp mod">
+        <pc:chgData name="Koray Soguksu" userId="3e220d5204457e8d" providerId="LiveId" clId="{AE6BC8F6-E0CC-4B92-83ED-344A53F02923}" dt="2026-04-27T08:44:27.306" v="31" actId="21"/>
+        <pc:sldMkLst>
+          <pc:docMk/>
+          <pc:sldMk cId="780889103" sldId="262"/>
+        </pc:sldMkLst>
+        <pc:picChg chg="add del mod">
+          <ac:chgData name="Koray Soguksu" userId="3e220d5204457e8d" providerId="LiveId" clId="{AE6BC8F6-E0CC-4B92-83ED-344A53F02923}" dt="2026-04-27T08:44:27.306" v="31" actId="21"/>
+          <ac:picMkLst>
+            <pc:docMk/>
+            <pc:sldMk cId="780889103" sldId="262"/>
+            <ac:picMk id="5" creationId="{00CE402C-9EE6-5227-F892-74B1618F9A55}"/>
+          </ac:picMkLst>
+        </pc:picChg>
       </pc:sldChg>
     </pc:docChg>
   </pc:docChgLst>
@@ -4403,8 +4472,8 @@
         </p:nvSpPr>
         <p:spPr>
           <a:xfrm>
-            <a:off x="645251" y="2572966"/>
-            <a:ext cx="10901497" cy="3827834"/>
+            <a:off x="645251" y="2070046"/>
+            <a:ext cx="5366443" cy="3827834"/>
           </a:xfrm>
         </p:spPr>
         <p:txBody>
@@ -4751,7 +4820,7 @@
               </a:rPr>
               <a:t>:</a:t>
             </a:r>
-            <a:endParaRPr lang="de-CH" sz="1800" dirty="0">
+            <a:endParaRPr lang="de-CH" dirty="0">
               <a:solidFill>
                 <a:srgbClr val="212121"/>
               </a:solidFill>
@@ -4766,6 +4835,9 @@
           </a:p>
           <a:p>
             <a:pPr marL="742950" lvl="1" indent="-285750">
+              <a:lnSpc>
+                <a:spcPct val="100000"/>
+              </a:lnSpc>
               <a:buFont typeface="Arial" panose="020B0604020202020204" pitchFamily="34" charset="0"/>
               <a:buChar char="•"/>
             </a:pPr>
@@ -4836,6 +4908,9 @@
           </a:p>
           <a:p>
             <a:pPr marL="742950" lvl="1" indent="-285750">
+              <a:lnSpc>
+                <a:spcPct val="100000"/>
+              </a:lnSpc>
               <a:buFont typeface="Arial" panose="020B0604020202020204" pitchFamily="34" charset="0"/>
               <a:buChar char="•"/>
             </a:pPr>
@@ -4954,6 +5029,36 @@
           </a:p>
         </p:txBody>
       </p:sp>
+      <p:pic>
+        <p:nvPicPr>
+          <p:cNvPr id="5" name="Grafik 4" descr="The image depicts a document interface with a legal XML converter tool, featuring a user interface prompting to create XML files and a report, initiated by a Python script.&#10;&#10;KI-generierte Inhalte können fehlerhaft sein.">
+            <a:extLst>
+              <a:ext uri="{FF2B5EF4-FFF2-40B4-BE49-F238E27FC236}">
+                <a16:creationId xmlns:a16="http://schemas.microsoft.com/office/drawing/2014/main" id="{00CE402C-9EE6-5227-F892-74B1618F9A55}"/>
+              </a:ext>
+            </a:extLst>
+          </p:cNvPr>
+          <p:cNvPicPr>
+            <a:picLocks noChangeAspect="1"/>
+          </p:cNvPicPr>
+          <p:nvPr/>
+        </p:nvPicPr>
+        <p:blipFill>
+          <a:blip r:embed="rId2"/>
+          <a:stretch>
+            <a:fillRect/>
+          </a:stretch>
+        </p:blipFill>
+        <p:spPr>
+          <a:xfrm>
+            <a:off x="5953879" y="2174287"/>
+            <a:ext cx="6238121" cy="2509426"/>
+          </a:xfrm>
+          <a:prstGeom prst="rect">
+            <a:avLst/>
+          </a:prstGeom>
+        </p:spPr>
+      </p:pic>
     </p:spTree>
   </p:cSld>
   <p:clrMapOvr>
@@ -5069,7 +5174,7 @@
         <p:spPr>
           <a:xfrm>
             <a:off x="630660" y="3000983"/>
-            <a:ext cx="10930680" cy="3399817"/>
+            <a:ext cx="5845444" cy="3399817"/>
           </a:xfrm>
         </p:spPr>
         <p:txBody>
